--- a/Domingo-14/S01_Domingo-14_2_Post_Nueva-forma-de-resolver_9x16.pptx
+++ b/Domingo-14/S01_Domingo-14_2_Post_Nueva-forma-de-resolver_9x16.pptx
@@ -3231,7 +3231,7 @@
         <p:spPr>
           <a:xfrm>
             <a:off x="777240" y="777240"/>
-            <a:ext cx="2647188" cy="373380"/>
+            <a:ext cx="1892808" cy="373380"/>
           </a:xfrm>
           <a:prstGeom prst="roundRect">
             <a:avLst>
@@ -3272,7 +3272,7 @@
                 </a:solidFill>
                 <a:latin typeface="Inter"/>
               </a:rPr>
-              <a:t>ATENTO ESTA SEMANA</a:t>
+              <a:t>EARLY ACCESS</a:t>
             </a:r>
           </a:p>
         </p:txBody>
@@ -3285,7 +3285,7 @@
         </p:nvSpPr>
         <p:spPr>
           <a:xfrm>
-            <a:off x="777240" y="1280160"/>
+            <a:off x="777240" y="2678811"/>
             <a:ext cx="1371600" cy="146304"/>
           </a:xfrm>
           <a:prstGeom prst="rect">
@@ -3329,8 +3329,8 @@
         </p:nvSpPr>
         <p:spPr>
           <a:xfrm>
-            <a:off x="777240" y="1737360"/>
-            <a:ext cx="6675120" cy="10960608"/>
+            <a:off x="777240" y="3136011"/>
+            <a:ext cx="6675120" cy="7626858"/>
           </a:xfrm>
           <a:prstGeom prst="rect">
             <a:avLst/>
@@ -3349,13 +3349,22 @@
               </a:lnSpc>
             </a:pPr>
             <a:r>
-              <a:rPr sz="8400" b="1">
+              <a:rPr sz="7700" b="1">
+                <a:solidFill>
+                  <a:srgbClr val="7C3AED"/>
+                </a:solidFill>
+                <a:latin typeface="Inter"/>
+              </a:rPr>
+              <a:t>Ya disponible.</a:t>
+            </a:r>
+            <a:r>
+              <a:rPr sz="7700" b="1">
                 <a:solidFill>
                   <a:srgbClr val="FFFFFF"/>
                 </a:solidFill>
                 <a:latin typeface="Inter"/>
               </a:rPr>
-              <a:t>Una nueva forma de resolver lo legal y lo contable en Venezuela.</a:t>
+              <a:t> Tu asesoría legal, 100% en línea.</a:t>
             </a:r>
           </a:p>
         </p:txBody>
@@ -3363,6 +3372,45 @@
       <p:sp>
         <p:nvSpPr>
           <p:cNvPr id="8" name="TextBox 7"/>
+          <p:cNvSpPr txBox="1"/>
+          <p:nvPr/>
+        </p:nvSpPr>
+        <p:spPr>
+          <a:xfrm>
+            <a:off x="777240" y="10762869"/>
+            <a:ext cx="6675120" cy="1943608"/>
+          </a:xfrm>
+          <a:prstGeom prst="rect">
+            <a:avLst/>
+          </a:prstGeom>
+          <a:noFill/>
+        </p:spPr>
+        <p:txBody>
+          <a:bodyPr wrap="square" anchor="t" lIns="0" rIns="0" tIns="0" bIns="0">
+            <a:spAutoFit/>
+          </a:bodyPr>
+          <a:lstStyle/>
+          <a:p>
+            <a:pPr algn="l">
+              <a:lnSpc>
+                <a:spcPct val="110000"/>
+              </a:lnSpc>
+            </a:pPr>
+            <a:r>
+              <a:rPr sz="2600" b="0">
+                <a:solidFill>
+                  <a:srgbClr val="FFFFFF"/>
+                </a:solidFill>
+                <a:latin typeface="Inter"/>
+              </a:rPr>
+              <a:t>Contratos, consultas y casos con abogados certificados. notaly.com.ve</a:t>
+            </a:r>
+          </a:p>
+        </p:txBody>
+      </p:sp>
+      <p:sp>
+        <p:nvSpPr>
+          <p:cNvPr id="9" name="TextBox 8"/>
           <p:cNvSpPr txBox="1"/>
           <p:nvPr/>
         </p:nvSpPr>

--- a/Domingo-14/S01_Domingo-14_2_Post_Nueva-forma-de-resolver_9x16.pptx
+++ b/Domingo-14/S01_Domingo-14_2_Post_Nueva-forma-de-resolver_9x16.pptx
@@ -3231,7 +3231,7 @@
         <p:spPr>
           <a:xfrm>
             <a:off x="777240" y="777240"/>
-            <a:ext cx="1892808" cy="373380"/>
+            <a:ext cx="2395728" cy="373380"/>
           </a:xfrm>
           <a:prstGeom prst="roundRect">
             <a:avLst>
@@ -3272,7 +3272,7 @@
                 </a:solidFill>
                 <a:latin typeface="Inter"/>
               </a:rPr>
-              <a:t>EARLY ACCESS</a:t>
+              <a:t>NOTALY VENEZUELA</a:t>
             </a:r>
           </a:p>
         </p:txBody>
@@ -3285,7 +3285,7 @@
         </p:nvSpPr>
         <p:spPr>
           <a:xfrm>
-            <a:off x="777240" y="2678811"/>
+            <a:off x="777240" y="2694686"/>
             <a:ext cx="1371600" cy="146304"/>
           </a:xfrm>
           <a:prstGeom prst="rect">
@@ -3329,8 +3329,8 @@
         </p:nvSpPr>
         <p:spPr>
           <a:xfrm>
-            <a:off x="777240" y="3136011"/>
-            <a:ext cx="6675120" cy="7626858"/>
+            <a:off x="777240" y="3151886"/>
+            <a:ext cx="6675120" cy="7595108"/>
           </a:xfrm>
           <a:prstGeom prst="rect">
             <a:avLst/>
@@ -3349,22 +3349,13 @@
               </a:lnSpc>
             </a:pPr>
             <a:r>
-              <a:rPr sz="7700" b="1">
-                <a:solidFill>
-                  <a:srgbClr val="7C3AED"/>
-                </a:solidFill>
-                <a:latin typeface="Inter"/>
-              </a:rPr>
-              <a:t>Ya disponible.</a:t>
-            </a:r>
-            <a:r>
-              <a:rPr sz="7700" b="1">
+              <a:rPr sz="9200" b="1">
                 <a:solidFill>
                   <a:srgbClr val="FFFFFF"/>
                 </a:solidFill>
                 <a:latin typeface="Inter"/>
               </a:rPr>
-              <a:t> Tu asesoría legal, 100% en línea.</a:t>
+              <a:t>Tu asesoría legal, 100% en línea.</a:t>
             </a:r>
           </a:p>
         </p:txBody>
@@ -3377,7 +3368,7 @@
         </p:nvSpPr>
         <p:spPr>
           <a:xfrm>
-            <a:off x="777240" y="10762869"/>
+            <a:off x="777240" y="10746994"/>
             <a:ext cx="6675120" cy="1943608"/>
           </a:xfrm>
           <a:prstGeom prst="rect">
